--- a/誰曾應許.pptx
+++ b/誰曾應許.pptx
@@ -170,10 +170,9 @@
           <a:lstStyle/>
           <a:p>
             <a:r>
-              <a:rPr lang="zh-TW" altLang="en-US" smtClean="0"/>
+              <a:rPr lang="zh-TW" altLang="en-US"/>
               <a:t>按一下以編輯母片標題樣式</a:t>
             </a:r>
-            <a:endParaRPr lang="zh-TW" altLang="en-US"/>
           </a:p>
         </p:txBody>
       </p:sp>
@@ -289,10 +288,9 @@
           </a:lstStyle>
           <a:p>
             <a:r>
-              <a:rPr lang="zh-TW" altLang="en-US" smtClean="0"/>
+              <a:rPr lang="zh-TW" altLang="en-US"/>
               <a:t>按一下以編輯母片副標題樣式</a:t>
             </a:r>
-            <a:endParaRPr lang="zh-TW" altLang="en-US"/>
           </a:p>
         </p:txBody>
       </p:sp>
@@ -314,7 +312,7 @@
             <a:fld id="{434AC38D-EE3B-4EDB-A3F3-E8DB5FCDF8C7}" type="datetimeFigureOut">
               <a:rPr lang="en-US" smtClean="0"/>
               <a:pPr/>
-              <a:t>3/9/2023</a:t>
+              <a:t>4/4/2025</a:t>
             </a:fld>
             <a:endParaRPr lang="en-US"/>
           </a:p>
@@ -404,10 +402,9 @@
           <a:lstStyle/>
           <a:p>
             <a:r>
-              <a:rPr lang="zh-TW" altLang="en-US" smtClean="0"/>
+              <a:rPr lang="zh-TW" altLang="en-US"/>
               <a:t>按一下以編輯母片標題樣式</a:t>
             </a:r>
-            <a:endParaRPr lang="zh-TW" altLang="en-US"/>
           </a:p>
         </p:txBody>
       </p:sp>
@@ -428,38 +425,37 @@
           <a:p>
             <a:pPr lvl="0"/>
             <a:r>
-              <a:rPr lang="zh-TW" altLang="en-US" smtClean="0"/>
+              <a:rPr lang="zh-TW" altLang="en-US"/>
               <a:t>按一下以編輯母片文字樣式</a:t>
             </a:r>
           </a:p>
           <a:p>
             <a:pPr lvl="1"/>
             <a:r>
-              <a:rPr lang="zh-TW" altLang="en-US" smtClean="0"/>
+              <a:rPr lang="zh-TW" altLang="en-US"/>
               <a:t>第二層</a:t>
             </a:r>
           </a:p>
           <a:p>
             <a:pPr lvl="2"/>
             <a:r>
-              <a:rPr lang="zh-TW" altLang="en-US" smtClean="0"/>
+              <a:rPr lang="zh-TW" altLang="en-US"/>
               <a:t>第三層</a:t>
             </a:r>
           </a:p>
           <a:p>
             <a:pPr lvl="3"/>
             <a:r>
-              <a:rPr lang="zh-TW" altLang="en-US" smtClean="0"/>
+              <a:rPr lang="zh-TW" altLang="en-US"/>
               <a:t>第四層</a:t>
             </a:r>
           </a:p>
           <a:p>
             <a:pPr lvl="4"/>
             <a:r>
-              <a:rPr lang="zh-TW" altLang="en-US" smtClean="0"/>
+              <a:rPr lang="zh-TW" altLang="en-US"/>
               <a:t>第五層</a:t>
             </a:r>
-            <a:endParaRPr lang="zh-TW" altLang="en-US"/>
           </a:p>
         </p:txBody>
       </p:sp>
@@ -481,7 +477,7 @@
             <a:fld id="{434AC38D-EE3B-4EDB-A3F3-E8DB5FCDF8C7}" type="datetimeFigureOut">
               <a:rPr lang="en-US" smtClean="0"/>
               <a:pPr/>
-              <a:t>3/9/2023</a:t>
+              <a:t>4/4/2025</a:t>
             </a:fld>
             <a:endParaRPr lang="en-US"/>
           </a:p>
@@ -576,10 +572,9 @@
           <a:lstStyle/>
           <a:p>
             <a:r>
-              <a:rPr lang="zh-TW" altLang="en-US" smtClean="0"/>
+              <a:rPr lang="zh-TW" altLang="en-US"/>
               <a:t>按一下以編輯母片標題樣式</a:t>
             </a:r>
-            <a:endParaRPr lang="zh-TW" altLang="en-US"/>
           </a:p>
         </p:txBody>
       </p:sp>
@@ -605,38 +600,37 @@
           <a:p>
             <a:pPr lvl="0"/>
             <a:r>
-              <a:rPr lang="zh-TW" altLang="en-US" smtClean="0"/>
+              <a:rPr lang="zh-TW" altLang="en-US"/>
               <a:t>按一下以編輯母片文字樣式</a:t>
             </a:r>
           </a:p>
           <a:p>
             <a:pPr lvl="1"/>
             <a:r>
-              <a:rPr lang="zh-TW" altLang="en-US" smtClean="0"/>
+              <a:rPr lang="zh-TW" altLang="en-US"/>
               <a:t>第二層</a:t>
             </a:r>
           </a:p>
           <a:p>
             <a:pPr lvl="2"/>
             <a:r>
-              <a:rPr lang="zh-TW" altLang="en-US" smtClean="0"/>
+              <a:rPr lang="zh-TW" altLang="en-US"/>
               <a:t>第三層</a:t>
             </a:r>
           </a:p>
           <a:p>
             <a:pPr lvl="3"/>
             <a:r>
-              <a:rPr lang="zh-TW" altLang="en-US" smtClean="0"/>
+              <a:rPr lang="zh-TW" altLang="en-US"/>
               <a:t>第四層</a:t>
             </a:r>
           </a:p>
           <a:p>
             <a:pPr lvl="4"/>
             <a:r>
-              <a:rPr lang="zh-TW" altLang="en-US" smtClean="0"/>
+              <a:rPr lang="zh-TW" altLang="en-US"/>
               <a:t>第五層</a:t>
             </a:r>
-            <a:endParaRPr lang="zh-TW" altLang="en-US"/>
           </a:p>
         </p:txBody>
       </p:sp>
@@ -658,7 +652,7 @@
             <a:fld id="{434AC38D-EE3B-4EDB-A3F3-E8DB5FCDF8C7}" type="datetimeFigureOut">
               <a:rPr lang="en-US" smtClean="0"/>
               <a:pPr/>
-              <a:t>3/9/2023</a:t>
+              <a:t>4/4/2025</a:t>
             </a:fld>
             <a:endParaRPr lang="en-US"/>
           </a:p>
@@ -748,10 +742,9 @@
           <a:lstStyle/>
           <a:p>
             <a:r>
-              <a:rPr lang="zh-TW" altLang="en-US" smtClean="0"/>
+              <a:rPr lang="zh-TW" altLang="en-US"/>
               <a:t>按一下以編輯母片標題樣式</a:t>
             </a:r>
-            <a:endParaRPr lang="zh-TW" altLang="en-US"/>
           </a:p>
         </p:txBody>
       </p:sp>
@@ -772,38 +765,37 @@
           <a:p>
             <a:pPr lvl="0"/>
             <a:r>
-              <a:rPr lang="zh-TW" altLang="en-US" smtClean="0"/>
+              <a:rPr lang="zh-TW" altLang="en-US"/>
               <a:t>按一下以編輯母片文字樣式</a:t>
             </a:r>
           </a:p>
           <a:p>
             <a:pPr lvl="1"/>
             <a:r>
-              <a:rPr lang="zh-TW" altLang="en-US" smtClean="0"/>
+              <a:rPr lang="zh-TW" altLang="en-US"/>
               <a:t>第二層</a:t>
             </a:r>
           </a:p>
           <a:p>
             <a:pPr lvl="2"/>
             <a:r>
-              <a:rPr lang="zh-TW" altLang="en-US" smtClean="0"/>
+              <a:rPr lang="zh-TW" altLang="en-US"/>
               <a:t>第三層</a:t>
             </a:r>
           </a:p>
           <a:p>
             <a:pPr lvl="3"/>
             <a:r>
-              <a:rPr lang="zh-TW" altLang="en-US" smtClean="0"/>
+              <a:rPr lang="zh-TW" altLang="en-US"/>
               <a:t>第四層</a:t>
             </a:r>
           </a:p>
           <a:p>
             <a:pPr lvl="4"/>
             <a:r>
-              <a:rPr lang="zh-TW" altLang="en-US" smtClean="0"/>
+              <a:rPr lang="zh-TW" altLang="en-US"/>
               <a:t>第五層</a:t>
             </a:r>
-            <a:endParaRPr lang="zh-TW" altLang="en-US"/>
           </a:p>
         </p:txBody>
       </p:sp>
@@ -825,7 +817,7 @@
             <a:fld id="{434AC38D-EE3B-4EDB-A3F3-E8DB5FCDF8C7}" type="datetimeFigureOut">
               <a:rPr lang="en-US" smtClean="0"/>
               <a:pPr/>
-              <a:t>3/9/2023</a:t>
+              <a:t>4/4/2025</a:t>
             </a:fld>
             <a:endParaRPr lang="en-US"/>
           </a:p>
@@ -924,10 +916,9 @@
           </a:lstStyle>
           <a:p>
             <a:r>
-              <a:rPr lang="zh-TW" altLang="en-US" smtClean="0"/>
+              <a:rPr lang="zh-TW" altLang="en-US"/>
               <a:t>按一下以編輯母片標題樣式</a:t>
             </a:r>
-            <a:endParaRPr lang="zh-TW" altLang="en-US"/>
           </a:p>
         </p:txBody>
       </p:sp>
@@ -1044,7 +1035,7 @@
           <a:p>
             <a:pPr lvl="0"/>
             <a:r>
-              <a:rPr lang="zh-TW" altLang="en-US" smtClean="0"/>
+              <a:rPr lang="zh-TW" altLang="en-US"/>
               <a:t>按一下以編輯母片文字樣式</a:t>
             </a:r>
           </a:p>
@@ -1068,7 +1059,7 @@
             <a:fld id="{434AC38D-EE3B-4EDB-A3F3-E8DB5FCDF8C7}" type="datetimeFigureOut">
               <a:rPr lang="en-US" smtClean="0"/>
               <a:pPr/>
-              <a:t>3/9/2023</a:t>
+              <a:t>4/4/2025</a:t>
             </a:fld>
             <a:endParaRPr lang="en-US"/>
           </a:p>
@@ -1158,10 +1149,9 @@
           <a:lstStyle/>
           <a:p>
             <a:r>
-              <a:rPr lang="zh-TW" altLang="en-US" smtClean="0"/>
+              <a:rPr lang="zh-TW" altLang="en-US"/>
               <a:t>按一下以編輯母片標題樣式</a:t>
             </a:r>
-            <a:endParaRPr lang="zh-TW" altLang="en-US"/>
           </a:p>
         </p:txBody>
       </p:sp>
@@ -1215,38 +1205,37 @@
           <a:p>
             <a:pPr lvl="0"/>
             <a:r>
-              <a:rPr lang="zh-TW" altLang="en-US" smtClean="0"/>
+              <a:rPr lang="zh-TW" altLang="en-US"/>
               <a:t>按一下以編輯母片文字樣式</a:t>
             </a:r>
           </a:p>
           <a:p>
             <a:pPr lvl="1"/>
             <a:r>
-              <a:rPr lang="zh-TW" altLang="en-US" smtClean="0"/>
+              <a:rPr lang="zh-TW" altLang="en-US"/>
               <a:t>第二層</a:t>
             </a:r>
           </a:p>
           <a:p>
             <a:pPr lvl="2"/>
             <a:r>
-              <a:rPr lang="zh-TW" altLang="en-US" smtClean="0"/>
+              <a:rPr lang="zh-TW" altLang="en-US"/>
               <a:t>第三層</a:t>
             </a:r>
           </a:p>
           <a:p>
             <a:pPr lvl="3"/>
             <a:r>
-              <a:rPr lang="zh-TW" altLang="en-US" smtClean="0"/>
+              <a:rPr lang="zh-TW" altLang="en-US"/>
               <a:t>第四層</a:t>
             </a:r>
           </a:p>
           <a:p>
             <a:pPr lvl="4"/>
             <a:r>
-              <a:rPr lang="zh-TW" altLang="en-US" smtClean="0"/>
+              <a:rPr lang="zh-TW" altLang="en-US"/>
               <a:t>第五層</a:t>
             </a:r>
-            <a:endParaRPr lang="zh-TW" altLang="en-US"/>
           </a:p>
         </p:txBody>
       </p:sp>
@@ -1300,38 +1289,37 @@
           <a:p>
             <a:pPr lvl="0"/>
             <a:r>
-              <a:rPr lang="zh-TW" altLang="en-US" smtClean="0"/>
+              <a:rPr lang="zh-TW" altLang="en-US"/>
               <a:t>按一下以編輯母片文字樣式</a:t>
             </a:r>
           </a:p>
           <a:p>
             <a:pPr lvl="1"/>
             <a:r>
-              <a:rPr lang="zh-TW" altLang="en-US" smtClean="0"/>
+              <a:rPr lang="zh-TW" altLang="en-US"/>
               <a:t>第二層</a:t>
             </a:r>
           </a:p>
           <a:p>
             <a:pPr lvl="2"/>
             <a:r>
-              <a:rPr lang="zh-TW" altLang="en-US" smtClean="0"/>
+              <a:rPr lang="zh-TW" altLang="en-US"/>
               <a:t>第三層</a:t>
             </a:r>
           </a:p>
           <a:p>
             <a:pPr lvl="3"/>
             <a:r>
-              <a:rPr lang="zh-TW" altLang="en-US" smtClean="0"/>
+              <a:rPr lang="zh-TW" altLang="en-US"/>
               <a:t>第四層</a:t>
             </a:r>
           </a:p>
           <a:p>
             <a:pPr lvl="4"/>
             <a:r>
-              <a:rPr lang="zh-TW" altLang="en-US" smtClean="0"/>
+              <a:rPr lang="zh-TW" altLang="en-US"/>
               <a:t>第五層</a:t>
             </a:r>
-            <a:endParaRPr lang="zh-TW" altLang="en-US"/>
           </a:p>
         </p:txBody>
       </p:sp>
@@ -1353,7 +1341,7 @@
             <a:fld id="{434AC38D-EE3B-4EDB-A3F3-E8DB5FCDF8C7}" type="datetimeFigureOut">
               <a:rPr lang="en-US" smtClean="0"/>
               <a:pPr/>
-              <a:t>3/9/2023</a:t>
+              <a:t>4/4/2025</a:t>
             </a:fld>
             <a:endParaRPr lang="en-US"/>
           </a:p>
@@ -1447,10 +1435,9 @@
           </a:lstStyle>
           <a:p>
             <a:r>
-              <a:rPr lang="zh-TW" altLang="en-US" smtClean="0"/>
+              <a:rPr lang="zh-TW" altLang="en-US"/>
               <a:t>按一下以編輯母片標題樣式</a:t>
             </a:r>
-            <a:endParaRPr lang="zh-TW" altLang="en-US"/>
           </a:p>
         </p:txBody>
       </p:sp>
@@ -1513,7 +1500,7 @@
           <a:p>
             <a:pPr lvl="0"/>
             <a:r>
-              <a:rPr lang="zh-TW" altLang="en-US" smtClean="0"/>
+              <a:rPr lang="zh-TW" altLang="en-US"/>
               <a:t>按一下以編輯母片文字樣式</a:t>
             </a:r>
           </a:p>
@@ -1569,38 +1556,37 @@
           <a:p>
             <a:pPr lvl="0"/>
             <a:r>
-              <a:rPr lang="zh-TW" altLang="en-US" smtClean="0"/>
+              <a:rPr lang="zh-TW" altLang="en-US"/>
               <a:t>按一下以編輯母片文字樣式</a:t>
             </a:r>
           </a:p>
           <a:p>
             <a:pPr lvl="1"/>
             <a:r>
-              <a:rPr lang="zh-TW" altLang="en-US" smtClean="0"/>
+              <a:rPr lang="zh-TW" altLang="en-US"/>
               <a:t>第二層</a:t>
             </a:r>
           </a:p>
           <a:p>
             <a:pPr lvl="2"/>
             <a:r>
-              <a:rPr lang="zh-TW" altLang="en-US" smtClean="0"/>
+              <a:rPr lang="zh-TW" altLang="en-US"/>
               <a:t>第三層</a:t>
             </a:r>
           </a:p>
           <a:p>
             <a:pPr lvl="3"/>
             <a:r>
-              <a:rPr lang="zh-TW" altLang="en-US" smtClean="0"/>
+              <a:rPr lang="zh-TW" altLang="en-US"/>
               <a:t>第四層</a:t>
             </a:r>
           </a:p>
           <a:p>
             <a:pPr lvl="4"/>
             <a:r>
-              <a:rPr lang="zh-TW" altLang="en-US" smtClean="0"/>
+              <a:rPr lang="zh-TW" altLang="en-US"/>
               <a:t>第五層</a:t>
             </a:r>
-            <a:endParaRPr lang="zh-TW" altLang="en-US"/>
           </a:p>
         </p:txBody>
       </p:sp>
@@ -1663,7 +1649,7 @@
           <a:p>
             <a:pPr lvl="0"/>
             <a:r>
-              <a:rPr lang="zh-TW" altLang="en-US" smtClean="0"/>
+              <a:rPr lang="zh-TW" altLang="en-US"/>
               <a:t>按一下以編輯母片文字樣式</a:t>
             </a:r>
           </a:p>
@@ -1719,38 +1705,37 @@
           <a:p>
             <a:pPr lvl="0"/>
             <a:r>
-              <a:rPr lang="zh-TW" altLang="en-US" smtClean="0"/>
+              <a:rPr lang="zh-TW" altLang="en-US"/>
               <a:t>按一下以編輯母片文字樣式</a:t>
             </a:r>
           </a:p>
           <a:p>
             <a:pPr lvl="1"/>
             <a:r>
-              <a:rPr lang="zh-TW" altLang="en-US" smtClean="0"/>
+              <a:rPr lang="zh-TW" altLang="en-US"/>
               <a:t>第二層</a:t>
             </a:r>
           </a:p>
           <a:p>
             <a:pPr lvl="2"/>
             <a:r>
-              <a:rPr lang="zh-TW" altLang="en-US" smtClean="0"/>
+              <a:rPr lang="zh-TW" altLang="en-US"/>
               <a:t>第三層</a:t>
             </a:r>
           </a:p>
           <a:p>
             <a:pPr lvl="3"/>
             <a:r>
-              <a:rPr lang="zh-TW" altLang="en-US" smtClean="0"/>
+              <a:rPr lang="zh-TW" altLang="en-US"/>
               <a:t>第四層</a:t>
             </a:r>
           </a:p>
           <a:p>
             <a:pPr lvl="4"/>
             <a:r>
-              <a:rPr lang="zh-TW" altLang="en-US" smtClean="0"/>
+              <a:rPr lang="zh-TW" altLang="en-US"/>
               <a:t>第五層</a:t>
             </a:r>
-            <a:endParaRPr lang="zh-TW" altLang="en-US"/>
           </a:p>
         </p:txBody>
       </p:sp>
@@ -1772,7 +1757,7 @@
             <a:fld id="{434AC38D-EE3B-4EDB-A3F3-E8DB5FCDF8C7}" type="datetimeFigureOut">
               <a:rPr lang="en-US" smtClean="0"/>
               <a:pPr/>
-              <a:t>3/9/2023</a:t>
+              <a:t>4/4/2025</a:t>
             </a:fld>
             <a:endParaRPr lang="en-US"/>
           </a:p>
@@ -1862,10 +1847,9 @@
           <a:lstStyle/>
           <a:p>
             <a:r>
-              <a:rPr lang="zh-TW" altLang="en-US" smtClean="0"/>
+              <a:rPr lang="zh-TW" altLang="en-US"/>
               <a:t>按一下以編輯母片標題樣式</a:t>
             </a:r>
-            <a:endParaRPr lang="zh-TW" altLang="en-US"/>
           </a:p>
         </p:txBody>
       </p:sp>
@@ -1887,7 +1871,7 @@
             <a:fld id="{434AC38D-EE3B-4EDB-A3F3-E8DB5FCDF8C7}" type="datetimeFigureOut">
               <a:rPr lang="en-US" smtClean="0"/>
               <a:pPr/>
-              <a:t>3/9/2023</a:t>
+              <a:t>4/4/2025</a:t>
             </a:fld>
             <a:endParaRPr lang="en-US"/>
           </a:p>
@@ -1979,7 +1963,7 @@
             <a:fld id="{434AC38D-EE3B-4EDB-A3F3-E8DB5FCDF8C7}" type="datetimeFigureOut">
               <a:rPr lang="en-US" smtClean="0"/>
               <a:pPr/>
-              <a:t>3/9/2023</a:t>
+              <a:t>4/4/2025</a:t>
             </a:fld>
             <a:endParaRPr lang="en-US"/>
           </a:p>
@@ -2078,10 +2062,9 @@
           </a:lstStyle>
           <a:p>
             <a:r>
-              <a:rPr lang="zh-TW" altLang="en-US" smtClean="0"/>
+              <a:rPr lang="zh-TW" altLang="en-US"/>
               <a:t>按一下以編輯母片標題樣式</a:t>
             </a:r>
-            <a:endParaRPr lang="zh-TW" altLang="en-US"/>
           </a:p>
         </p:txBody>
       </p:sp>
@@ -2135,38 +2118,37 @@
           <a:p>
             <a:pPr lvl="0"/>
             <a:r>
-              <a:rPr lang="zh-TW" altLang="en-US" smtClean="0"/>
+              <a:rPr lang="zh-TW" altLang="en-US"/>
               <a:t>按一下以編輯母片文字樣式</a:t>
             </a:r>
           </a:p>
           <a:p>
             <a:pPr lvl="1"/>
             <a:r>
-              <a:rPr lang="zh-TW" altLang="en-US" smtClean="0"/>
+              <a:rPr lang="zh-TW" altLang="en-US"/>
               <a:t>第二層</a:t>
             </a:r>
           </a:p>
           <a:p>
             <a:pPr lvl="2"/>
             <a:r>
-              <a:rPr lang="zh-TW" altLang="en-US" smtClean="0"/>
+              <a:rPr lang="zh-TW" altLang="en-US"/>
               <a:t>第三層</a:t>
             </a:r>
           </a:p>
           <a:p>
             <a:pPr lvl="3"/>
             <a:r>
-              <a:rPr lang="zh-TW" altLang="en-US" smtClean="0"/>
+              <a:rPr lang="zh-TW" altLang="en-US"/>
               <a:t>第四層</a:t>
             </a:r>
           </a:p>
           <a:p>
             <a:pPr lvl="4"/>
             <a:r>
-              <a:rPr lang="zh-TW" altLang="en-US" smtClean="0"/>
+              <a:rPr lang="zh-TW" altLang="en-US"/>
               <a:t>第五層</a:t>
             </a:r>
-            <a:endParaRPr lang="zh-TW" altLang="en-US"/>
           </a:p>
         </p:txBody>
       </p:sp>
@@ -2229,7 +2211,7 @@
           <a:p>
             <a:pPr lvl="0"/>
             <a:r>
-              <a:rPr lang="zh-TW" altLang="en-US" smtClean="0"/>
+              <a:rPr lang="zh-TW" altLang="en-US"/>
               <a:t>按一下以編輯母片文字樣式</a:t>
             </a:r>
           </a:p>
@@ -2253,7 +2235,7 @@
             <a:fld id="{434AC38D-EE3B-4EDB-A3F3-E8DB5FCDF8C7}" type="datetimeFigureOut">
               <a:rPr lang="en-US" smtClean="0"/>
               <a:pPr/>
-              <a:t>3/9/2023</a:t>
+              <a:t>4/4/2025</a:t>
             </a:fld>
             <a:endParaRPr lang="en-US"/>
           </a:p>
@@ -2352,10 +2334,9 @@
           </a:lstStyle>
           <a:p>
             <a:r>
-              <a:rPr lang="zh-TW" altLang="en-US" smtClean="0"/>
+              <a:rPr lang="zh-TW" altLang="en-US"/>
               <a:t>按一下以編輯母片標題樣式</a:t>
             </a:r>
-            <a:endParaRPr lang="zh-TW" altLang="en-US"/>
           </a:p>
         </p:txBody>
       </p:sp>
@@ -2417,10 +2398,9 @@
           </a:lstStyle>
           <a:p>
             <a:r>
-              <a:rPr lang="zh-TW" altLang="en-US" smtClean="0"/>
+              <a:rPr lang="zh-TW" altLang="en-US"/>
               <a:t>按一下圖示以新增圖片</a:t>
             </a:r>
-            <a:endParaRPr lang="zh-TW" altLang="en-US"/>
           </a:p>
         </p:txBody>
       </p:sp>
@@ -2483,7 +2463,7 @@
           <a:p>
             <a:pPr lvl="0"/>
             <a:r>
-              <a:rPr lang="zh-TW" altLang="en-US" smtClean="0"/>
+              <a:rPr lang="zh-TW" altLang="en-US"/>
               <a:t>按一下以編輯母片文字樣式</a:t>
             </a:r>
           </a:p>
@@ -2507,7 +2487,7 @@
             <a:fld id="{434AC38D-EE3B-4EDB-A3F3-E8DB5FCDF8C7}" type="datetimeFigureOut">
               <a:rPr lang="en-US" smtClean="0"/>
               <a:pPr/>
-              <a:t>3/9/2023</a:t>
+              <a:t>4/4/2025</a:t>
             </a:fld>
             <a:endParaRPr lang="en-US"/>
           </a:p>
@@ -2617,10 +2597,9 @@
           <a:lstStyle/>
           <a:p>
             <a:r>
-              <a:rPr lang="zh-TW" altLang="en-US" smtClean="0"/>
+              <a:rPr lang="zh-TW" altLang="en-US"/>
               <a:t>按一下以編輯母片標題樣式</a:t>
             </a:r>
-            <a:endParaRPr lang="zh-TW" altLang="en-US"/>
           </a:p>
         </p:txBody>
       </p:sp>
@@ -2651,38 +2630,37 @@
           <a:p>
             <a:pPr lvl="0"/>
             <a:r>
-              <a:rPr lang="zh-TW" altLang="en-US" smtClean="0"/>
+              <a:rPr lang="zh-TW" altLang="en-US"/>
               <a:t>按一下以編輯母片文字樣式</a:t>
             </a:r>
           </a:p>
           <a:p>
             <a:pPr lvl="1"/>
             <a:r>
-              <a:rPr lang="zh-TW" altLang="en-US" smtClean="0"/>
+              <a:rPr lang="zh-TW" altLang="en-US"/>
               <a:t>第二層</a:t>
             </a:r>
           </a:p>
           <a:p>
             <a:pPr lvl="2"/>
             <a:r>
-              <a:rPr lang="zh-TW" altLang="en-US" smtClean="0"/>
+              <a:rPr lang="zh-TW" altLang="en-US"/>
               <a:t>第三層</a:t>
             </a:r>
           </a:p>
           <a:p>
             <a:pPr lvl="3"/>
             <a:r>
-              <a:rPr lang="zh-TW" altLang="en-US" smtClean="0"/>
+              <a:rPr lang="zh-TW" altLang="en-US"/>
               <a:t>第四層</a:t>
             </a:r>
           </a:p>
           <a:p>
             <a:pPr lvl="4"/>
             <a:r>
-              <a:rPr lang="zh-TW" altLang="en-US" smtClean="0"/>
+              <a:rPr lang="zh-TW" altLang="en-US"/>
               <a:t>第五層</a:t>
             </a:r>
-            <a:endParaRPr lang="zh-TW" altLang="en-US"/>
           </a:p>
         </p:txBody>
       </p:sp>
@@ -2722,7 +2700,7 @@
             <a:fld id="{434AC38D-EE3B-4EDB-A3F3-E8DB5FCDF8C7}" type="datetimeFigureOut">
               <a:rPr lang="en-US" smtClean="0"/>
               <a:pPr/>
-              <a:t>3/9/2023</a:t>
+              <a:t>4/4/2025</a:t>
             </a:fld>
             <a:endParaRPr lang="en-US"/>
           </a:p>
@@ -3116,7 +3094,7 @@
           <a:lstStyle/>
           <a:p>
             <a:r>
-              <a:rPr lang="zh-CN" altLang="en-US" sz="7200" b="1" i="1" dirty="0" smtClean="0">
+              <a:rPr lang="zh-CN" altLang="en-US" sz="7200" b="1" i="1" dirty="0">
                 <a:solidFill>
                   <a:srgbClr val="660033"/>
                 </a:solidFill>
@@ -3130,24 +3108,7 @@
                 <a:latin typeface="微軟正黑體" pitchFamily="34" charset="-120"/>
                 <a:ea typeface="微軟正黑體" pitchFamily="34" charset="-120"/>
               </a:rPr>
-              <a:t>誰</a:t>
-            </a:r>
-            <a:r>
-              <a:rPr lang="zh-CN" altLang="en-US" sz="7200" b="1" i="1" dirty="0">
-                <a:solidFill>
-                  <a:srgbClr val="660033"/>
-                </a:solidFill>
-                <a:effectLst>
-                  <a:outerShdw blurRad="38100" dist="38100" dir="2700000" algn="tl">
-                    <a:srgbClr val="000000">
-                      <a:alpha val="43137"/>
-                    </a:srgbClr>
-                  </a:outerShdw>
-                </a:effectLst>
-                <a:latin typeface="微軟正黑體" pitchFamily="34" charset="-120"/>
-                <a:ea typeface="微軟正黑體" pitchFamily="34" charset="-120"/>
-              </a:rPr>
-              <a:t>曾應許</a:t>
+              <a:t>誰曾應許</a:t>
             </a:r>
             <a:endParaRPr lang="zh-TW" altLang="en-US" sz="7200" b="1" i="1" dirty="0">
               <a:solidFill>
@@ -3244,7 +3205,7 @@
               <a:buNone/>
             </a:pPr>
             <a:r>
-              <a:rPr lang="zh-TW" altLang="en-US" sz="6400" b="1" dirty="0" smtClean="0">
+              <a:rPr lang="zh-TW" altLang="en-US" sz="6400" b="1" dirty="0">
                 <a:solidFill>
                   <a:srgbClr val="660033"/>
                 </a:solidFill>
@@ -3261,27 +3222,17 @@
                 <a:latin typeface="微軟正黑體" pitchFamily="34" charset="-120"/>
                 <a:ea typeface="微軟正黑體" pitchFamily="34" charset="-120"/>
               </a:rPr>
-              <a:t>袮</a:t>
-            </a:r>
-            <a:r>
-              <a:rPr lang="zh-TW" altLang="en-US" sz="6400" b="1" dirty="0" smtClean="0">
+              <a:t>祢</a:t>
+            </a:r>
+            <a:r>
+              <a:rPr lang="zh-TW" altLang="en-US" sz="6400" b="1" dirty="0">
                 <a:solidFill>
                   <a:srgbClr val="660033"/>
                 </a:solidFill>
                 <a:latin typeface="微軟正黑體" pitchFamily="34" charset="-120"/>
                 <a:ea typeface="微軟正黑體" pitchFamily="34" charset="-120"/>
               </a:rPr>
-              <a:t>竟</a:t>
-            </a:r>
-            <a:r>
-              <a:rPr lang="zh-TW" altLang="en-US" sz="6400" b="1" dirty="0">
-                <a:solidFill>
-                  <a:srgbClr val="660033"/>
-                </a:solidFill>
-                <a:latin typeface="微軟正黑體" pitchFamily="34" charset="-120"/>
-                <a:ea typeface="微軟正黑體" pitchFamily="34" charset="-120"/>
-              </a:rPr>
-              <a:t>這般顧念我</a:t>
+              <a:t>竟這般顧念我</a:t>
             </a:r>
             <a:endParaRPr lang="en-US" sz="6400" b="1" dirty="0">
               <a:solidFill>
@@ -3337,24 +3288,14 @@
               <a:t>結束</a:t>
             </a:r>
             <a:r>
-              <a:rPr lang="en-US" sz="3600" b="1" dirty="0" smtClean="0">
+              <a:rPr lang="en-US" sz="3600" b="1" dirty="0">
                 <a:solidFill>
                   <a:srgbClr val="660033"/>
                 </a:solidFill>
                 <a:latin typeface="Microsoft JhengHei" panose="020B0604030504040204" pitchFamily="34" charset="-120"/>
                 <a:ea typeface="Microsoft JhengHei" panose="020B0604030504040204" pitchFamily="34" charset="-120"/>
               </a:rPr>
-              <a:t> </a:t>
-            </a:r>
-            <a:r>
-              <a:rPr lang="en-US" sz="3600" b="1" dirty="0">
-                <a:solidFill>
-                  <a:srgbClr val="660033"/>
-                </a:solidFill>
-                <a:latin typeface="Microsoft JhengHei" panose="020B0604030504040204" pitchFamily="34" charset="-120"/>
-                <a:ea typeface="Microsoft JhengHei" panose="020B0604030504040204" pitchFamily="34" charset="-120"/>
-              </a:rPr>
-              <a:t>)</a:t>
+              <a:t> )</a:t>
             </a:r>
             <a:endParaRPr lang="vi-VN" sz="3600" b="1" dirty="0">
               <a:solidFill>
@@ -3421,24 +3362,14 @@
               <a:buNone/>
             </a:pPr>
             <a:r>
-              <a:rPr lang="zh-TW" altLang="en-US" sz="6400" b="1" dirty="0" smtClean="0">
+              <a:rPr lang="zh-TW" altLang="en-US" sz="6400" b="1" dirty="0">
                 <a:solidFill>
                   <a:srgbClr val="660033"/>
                 </a:solidFill>
                 <a:latin typeface="微軟正黑體" pitchFamily="34" charset="-120"/>
                 <a:ea typeface="微軟正黑體" pitchFamily="34" charset="-120"/>
               </a:rPr>
-              <a:t>誰</a:t>
-            </a:r>
-            <a:r>
-              <a:rPr lang="zh-TW" altLang="en-US" sz="6400" b="1" dirty="0">
-                <a:solidFill>
-                  <a:srgbClr val="660033"/>
-                </a:solidFill>
-                <a:latin typeface="微軟正黑體" pitchFamily="34" charset="-120"/>
-                <a:ea typeface="微軟正黑體" pitchFamily="34" charset="-120"/>
-              </a:rPr>
-              <a:t>曾應許   一生不撇下我</a:t>
+              <a:t>誰曾應許   一生不撇下我</a:t>
             </a:r>
             <a:endParaRPr lang="en-US" altLang="zh-TW" sz="6400" b="1" dirty="0">
               <a:solidFill>
@@ -3506,7 +3437,7 @@
               <a:t>( </a:t>
             </a:r>
             <a:r>
-              <a:rPr lang="zh-CN" altLang="en-US" sz="3600" b="1" dirty="0" smtClean="0">
+              <a:rPr lang="zh-CN" altLang="en-US" sz="3600" b="1" dirty="0">
                 <a:solidFill>
                   <a:srgbClr val="660033"/>
                 </a:solidFill>
@@ -3516,24 +3447,14 @@
               <a:t>正歌</a:t>
             </a:r>
             <a:r>
-              <a:rPr lang="en-US" sz="3600" b="1" dirty="0" smtClean="0">
+              <a:rPr lang="en-US" sz="3600" b="1" dirty="0">
                 <a:solidFill>
                   <a:srgbClr val="660033"/>
                 </a:solidFill>
                 <a:latin typeface="Microsoft JhengHei" panose="020B0604030504040204" pitchFamily="34" charset="-120"/>
                 <a:ea typeface="Microsoft JhengHei" panose="020B0604030504040204" pitchFamily="34" charset="-120"/>
               </a:rPr>
-              <a:t> </a:t>
-            </a:r>
-            <a:r>
-              <a:rPr lang="en-US" sz="3600" b="1" dirty="0">
-                <a:solidFill>
-                  <a:srgbClr val="660033"/>
-                </a:solidFill>
-                <a:latin typeface="Microsoft JhengHei" panose="020B0604030504040204" pitchFamily="34" charset="-120"/>
-                <a:ea typeface="Microsoft JhengHei" panose="020B0604030504040204" pitchFamily="34" charset="-120"/>
-              </a:rPr>
-              <a:t>)</a:t>
+              <a:t> )</a:t>
             </a:r>
             <a:endParaRPr lang="vi-VN" sz="3600" b="1" dirty="0">
               <a:solidFill>
@@ -3675,7 +3596,7 @@
               <a:t>( </a:t>
             </a:r>
             <a:r>
-              <a:rPr lang="zh-CN" altLang="en-US" sz="3600" b="1" dirty="0" smtClean="0">
+              <a:rPr lang="zh-CN" altLang="en-US" sz="3600" b="1" dirty="0">
                 <a:solidFill>
                   <a:srgbClr val="660033"/>
                 </a:solidFill>
@@ -3685,24 +3606,14 @@
               <a:t>正歌</a:t>
             </a:r>
             <a:r>
-              <a:rPr lang="en-US" sz="3600" b="1" dirty="0" smtClean="0">
+              <a:rPr lang="en-US" sz="3600" b="1" dirty="0">
                 <a:solidFill>
                   <a:srgbClr val="660033"/>
                 </a:solidFill>
                 <a:latin typeface="Microsoft JhengHei" panose="020B0604030504040204" pitchFamily="34" charset="-120"/>
                 <a:ea typeface="Microsoft JhengHei" panose="020B0604030504040204" pitchFamily="34" charset="-120"/>
               </a:rPr>
-              <a:t> </a:t>
-            </a:r>
-            <a:r>
-              <a:rPr lang="en-US" sz="3600" b="1" dirty="0">
-                <a:solidFill>
-                  <a:srgbClr val="660033"/>
-                </a:solidFill>
-                <a:latin typeface="Microsoft JhengHei" panose="020B0604030504040204" pitchFamily="34" charset="-120"/>
-                <a:ea typeface="Microsoft JhengHei" panose="020B0604030504040204" pitchFamily="34" charset="-120"/>
-              </a:rPr>
-              <a:t>)</a:t>
+              <a:t> )</a:t>
             </a:r>
             <a:endParaRPr lang="vi-VN" sz="3600" b="1" dirty="0">
               <a:solidFill>
@@ -3844,7 +3755,7 @@
               <a:t>( </a:t>
             </a:r>
             <a:r>
-              <a:rPr lang="zh-CN" altLang="en-US" sz="3600" b="1" dirty="0" smtClean="0">
+              <a:rPr lang="zh-CN" altLang="en-US" sz="3600" b="1" dirty="0">
                 <a:solidFill>
                   <a:srgbClr val="660033"/>
                 </a:solidFill>
@@ -3854,24 +3765,14 @@
               <a:t>正歌</a:t>
             </a:r>
             <a:r>
-              <a:rPr lang="en-US" sz="3600" b="1" dirty="0" smtClean="0">
+              <a:rPr lang="en-US" sz="3600" b="1" dirty="0">
                 <a:solidFill>
                   <a:srgbClr val="660033"/>
                 </a:solidFill>
                 <a:latin typeface="Microsoft JhengHei" panose="020B0604030504040204" pitchFamily="34" charset="-120"/>
                 <a:ea typeface="Microsoft JhengHei" panose="020B0604030504040204" pitchFamily="34" charset="-120"/>
               </a:rPr>
-              <a:t> </a:t>
-            </a:r>
-            <a:r>
-              <a:rPr lang="en-US" sz="3600" b="1" dirty="0">
-                <a:solidFill>
-                  <a:srgbClr val="660033"/>
-                </a:solidFill>
-                <a:latin typeface="Microsoft JhengHei" panose="020B0604030504040204" pitchFamily="34" charset="-120"/>
-                <a:ea typeface="Microsoft JhengHei" panose="020B0604030504040204" pitchFamily="34" charset="-120"/>
-              </a:rPr>
-              <a:t>)</a:t>
+              <a:t> )</a:t>
             </a:r>
             <a:endParaRPr lang="vi-VN" sz="3600" b="1" dirty="0">
               <a:solidFill>
@@ -4013,7 +3914,7 @@
               <a:t>( </a:t>
             </a:r>
             <a:r>
-              <a:rPr lang="zh-CN" altLang="en-US" sz="3600" b="1" dirty="0" smtClean="0">
+              <a:rPr lang="zh-CN" altLang="en-US" sz="3600" b="1" dirty="0">
                 <a:solidFill>
                   <a:srgbClr val="660033"/>
                 </a:solidFill>
@@ -4023,24 +3924,14 @@
               <a:t>正歌</a:t>
             </a:r>
             <a:r>
-              <a:rPr lang="en-US" sz="3600" b="1" dirty="0" smtClean="0">
+              <a:rPr lang="en-US" sz="3600" b="1" dirty="0">
                 <a:solidFill>
                   <a:srgbClr val="660033"/>
                 </a:solidFill>
                 <a:latin typeface="Microsoft JhengHei" panose="020B0604030504040204" pitchFamily="34" charset="-120"/>
                 <a:ea typeface="Microsoft JhengHei" panose="020B0604030504040204" pitchFamily="34" charset="-120"/>
               </a:rPr>
-              <a:t> </a:t>
-            </a:r>
-            <a:r>
-              <a:rPr lang="en-US" sz="3600" b="1" dirty="0">
-                <a:solidFill>
-                  <a:srgbClr val="660033"/>
-                </a:solidFill>
-                <a:latin typeface="Microsoft JhengHei" panose="020B0604030504040204" pitchFamily="34" charset="-120"/>
-                <a:ea typeface="Microsoft JhengHei" panose="020B0604030504040204" pitchFamily="34" charset="-120"/>
-              </a:rPr>
-              <a:t>)</a:t>
+              <a:t> )</a:t>
             </a:r>
             <a:endParaRPr lang="vi-VN" sz="3600" b="1" dirty="0">
               <a:solidFill>
@@ -4107,7 +3998,7 @@
               <a:buNone/>
             </a:pPr>
             <a:r>
-              <a:rPr lang="zh-TW" altLang="en-US" sz="6400" b="1" dirty="0" smtClean="0">
+              <a:rPr lang="zh-TW" altLang="en-US" sz="6400" b="1" dirty="0">
                 <a:solidFill>
                   <a:srgbClr val="660033"/>
                 </a:solidFill>
@@ -4117,34 +4008,24 @@
               <a:t>因</a:t>
             </a:r>
             <a:r>
-              <a:rPr lang="zh-CN" altLang="en-US" sz="6400" b="1" dirty="0" smtClean="0">
+              <a:rPr lang="zh-CN" altLang="en-US" sz="6400" b="1" dirty="0">
                 <a:solidFill>
                   <a:srgbClr val="660033"/>
                 </a:solidFill>
                 <a:latin typeface="微軟正黑體" pitchFamily="34" charset="-120"/>
                 <a:ea typeface="微軟正黑體" pitchFamily="34" charset="-120"/>
               </a:rPr>
-              <a:t>袮</a:t>
-            </a:r>
-            <a:r>
-              <a:rPr lang="zh-TW" altLang="en-US" sz="6400" b="1" dirty="0" smtClean="0">
+              <a:t>祢</a:t>
+            </a:r>
+            <a:r>
+              <a:rPr lang="zh-TW" altLang="en-US" sz="6400" b="1" dirty="0">
                 <a:solidFill>
                   <a:srgbClr val="660033"/>
                 </a:solidFill>
                 <a:latin typeface="微軟正黑體" pitchFamily="34" charset="-120"/>
                 <a:ea typeface="微軟正黑體" pitchFamily="34" charset="-120"/>
               </a:rPr>
-              <a:t>是</a:t>
-            </a:r>
-            <a:r>
-              <a:rPr lang="zh-TW" altLang="en-US" sz="6400" b="1" dirty="0">
-                <a:solidFill>
-                  <a:srgbClr val="660033"/>
-                </a:solidFill>
-                <a:latin typeface="微軟正黑體" pitchFamily="34" charset="-120"/>
-                <a:ea typeface="微軟正黑體" pitchFamily="34" charset="-120"/>
-              </a:rPr>
-              <a:t>我主我避難所</a:t>
+              <a:t>是我主我避難所</a:t>
             </a:r>
             <a:endParaRPr lang="en-US" altLang="zh-TW" sz="6400" b="1" dirty="0">
               <a:solidFill>
@@ -4212,7 +4093,7 @@
               <a:t>( </a:t>
             </a:r>
             <a:r>
-              <a:rPr lang="zh-CN" altLang="en-US" sz="3600" b="1" dirty="0" smtClean="0">
+              <a:rPr lang="zh-CN" altLang="en-US" sz="3600" b="1" dirty="0">
                 <a:solidFill>
                   <a:srgbClr val="660033"/>
                 </a:solidFill>
@@ -4222,24 +4103,14 @@
               <a:t>副歌</a:t>
             </a:r>
             <a:r>
-              <a:rPr lang="en-US" sz="3600" b="1" dirty="0" smtClean="0">
+              <a:rPr lang="en-US" sz="3600" b="1" dirty="0">
                 <a:solidFill>
                   <a:srgbClr val="660033"/>
                 </a:solidFill>
                 <a:latin typeface="Microsoft JhengHei" panose="020B0604030504040204" pitchFamily="34" charset="-120"/>
                 <a:ea typeface="Microsoft JhengHei" panose="020B0604030504040204" pitchFamily="34" charset="-120"/>
               </a:rPr>
-              <a:t> </a:t>
-            </a:r>
-            <a:r>
-              <a:rPr lang="en-US" sz="3600" b="1" dirty="0">
-                <a:solidFill>
-                  <a:srgbClr val="660033"/>
-                </a:solidFill>
-                <a:latin typeface="Microsoft JhengHei" panose="020B0604030504040204" pitchFamily="34" charset="-120"/>
-                <a:ea typeface="Microsoft JhengHei" panose="020B0604030504040204" pitchFamily="34" charset="-120"/>
-              </a:rPr>
-              <a:t>)</a:t>
+              <a:t> )</a:t>
             </a:r>
             <a:endParaRPr lang="vi-VN" sz="3600" b="1" dirty="0">
               <a:solidFill>
@@ -4313,27 +4184,17 @@
                 <a:latin typeface="微軟正黑體" pitchFamily="34" charset="-120"/>
                 <a:ea typeface="微軟正黑體" pitchFamily="34" charset="-120"/>
               </a:rPr>
-              <a:t>袮</a:t>
-            </a:r>
-            <a:r>
-              <a:rPr lang="zh-TW" altLang="en-US" sz="6400" b="1" dirty="0" smtClean="0">
+              <a:t>祢</a:t>
+            </a:r>
+            <a:r>
+              <a:rPr lang="zh-TW" altLang="en-US" sz="6400" b="1" dirty="0">
                 <a:solidFill>
                   <a:srgbClr val="660033"/>
                 </a:solidFill>
                 <a:latin typeface="微軟正黑體" pitchFamily="34" charset="-120"/>
                 <a:ea typeface="微軟正黑體" pitchFamily="34" charset="-120"/>
               </a:rPr>
-              <a:t>是</a:t>
-            </a:r>
-            <a:r>
-              <a:rPr lang="zh-TW" altLang="en-US" sz="6400" b="1" dirty="0">
-                <a:solidFill>
-                  <a:srgbClr val="660033"/>
-                </a:solidFill>
-                <a:latin typeface="微軟正黑體" pitchFamily="34" charset="-120"/>
-                <a:ea typeface="微軟正黑體" pitchFamily="34" charset="-120"/>
-              </a:rPr>
-              <a:t>我的高臺我隨時幫助</a:t>
+              <a:t>是我的高臺我隨時幫助</a:t>
             </a:r>
             <a:endParaRPr lang="en-US" sz="6400" b="1" dirty="0">
               <a:solidFill>
@@ -4379,7 +4240,7 @@
               <a:t>( </a:t>
             </a:r>
             <a:r>
-              <a:rPr lang="zh-CN" altLang="en-US" sz="3600" b="1" dirty="0" smtClean="0">
+              <a:rPr lang="zh-CN" altLang="en-US" sz="3600" b="1" dirty="0">
                 <a:solidFill>
                   <a:srgbClr val="660033"/>
                 </a:solidFill>
@@ -4389,24 +4250,14 @@
               <a:t>副歌</a:t>
             </a:r>
             <a:r>
-              <a:rPr lang="en-US" sz="3600" b="1" dirty="0" smtClean="0">
+              <a:rPr lang="en-US" sz="3600" b="1" dirty="0">
                 <a:solidFill>
                   <a:srgbClr val="660033"/>
                 </a:solidFill>
                 <a:latin typeface="Microsoft JhengHei" panose="020B0604030504040204" pitchFamily="34" charset="-120"/>
                 <a:ea typeface="Microsoft JhengHei" panose="020B0604030504040204" pitchFamily="34" charset="-120"/>
               </a:rPr>
-              <a:t> </a:t>
-            </a:r>
-            <a:r>
-              <a:rPr lang="en-US" sz="3600" b="1" dirty="0">
-                <a:solidFill>
-                  <a:srgbClr val="660033"/>
-                </a:solidFill>
-                <a:latin typeface="Microsoft JhengHei" panose="020B0604030504040204" pitchFamily="34" charset="-120"/>
-                <a:ea typeface="Microsoft JhengHei" panose="020B0604030504040204" pitchFamily="34" charset="-120"/>
-              </a:rPr>
-              <a:t>)</a:t>
+              <a:t> )</a:t>
             </a:r>
             <a:endParaRPr lang="vi-VN" sz="3600" b="1" dirty="0">
               <a:solidFill>
@@ -4480,27 +4331,7 @@
                 <a:latin typeface="微軟正黑體" pitchFamily="34" charset="-120"/>
                 <a:ea typeface="微軟正黑體" pitchFamily="34" charset="-120"/>
               </a:rPr>
-              <a:t>來</a:t>
-            </a:r>
-            <a:r>
-              <a:rPr lang="zh-TW" altLang="en-US" sz="6400" b="1" dirty="0">
-                <a:solidFill>
-                  <a:srgbClr val="660033"/>
-                </a:solidFill>
-                <a:latin typeface="微軟正黑體" pitchFamily="34" charset="-120"/>
-                <a:ea typeface="微軟正黑體" pitchFamily="34" charset="-120"/>
-              </a:rPr>
-              <a:t>吧用</a:t>
-            </a:r>
-            <a:r>
-              <a:rPr lang="zh-TW" altLang="en-US" sz="6400" b="1" dirty="0">
-                <a:solidFill>
-                  <a:srgbClr val="660033"/>
-                </a:solidFill>
-                <a:latin typeface="微軟正黑體" pitchFamily="34" charset="-120"/>
-                <a:ea typeface="微軟正黑體" pitchFamily="34" charset="-120"/>
-              </a:rPr>
-              <a:t>信心讚頌和高歌</a:t>
+              <a:t>來吧用信心讚頌和高歌</a:t>
             </a:r>
             <a:endParaRPr lang="en-US" altLang="zh-TW" sz="6400" b="1" dirty="0">
               <a:solidFill>
@@ -4522,27 +4353,17 @@
                 <a:latin typeface="微軟正黑體" pitchFamily="34" charset="-120"/>
                 <a:ea typeface="微軟正黑體" pitchFamily="34" charset="-120"/>
               </a:rPr>
-              <a:t>袮</a:t>
-            </a:r>
-            <a:r>
-              <a:rPr lang="zh-TW" altLang="en-US" sz="6400" b="1" dirty="0" smtClean="0">
+              <a:t>祢</a:t>
+            </a:r>
+            <a:r>
+              <a:rPr lang="zh-TW" altLang="en-US" sz="6400" b="1" dirty="0">
                 <a:solidFill>
                   <a:srgbClr val="660033"/>
                 </a:solidFill>
                 <a:latin typeface="微軟正黑體" pitchFamily="34" charset="-120"/>
                 <a:ea typeface="微軟正黑體" pitchFamily="34" charset="-120"/>
               </a:rPr>
-              <a:t>永</a:t>
-            </a:r>
-            <a:r>
-              <a:rPr lang="zh-TW" altLang="en-US" sz="6400" b="1" dirty="0">
-                <a:solidFill>
-                  <a:srgbClr val="660033"/>
-                </a:solidFill>
-                <a:latin typeface="微軟正黑體" pitchFamily="34" charset="-120"/>
-                <a:ea typeface="微軟正黑體" pitchFamily="34" charset="-120"/>
-              </a:rPr>
-              <a:t>在我心窩</a:t>
+              <a:t>永在我心窩</a:t>
             </a:r>
             <a:endParaRPr lang="en-US" altLang="zh-TW" sz="6400" b="1" dirty="0">
               <a:solidFill>
@@ -4588,7 +4409,7 @@
               <a:t>( </a:t>
             </a:r>
             <a:r>
-              <a:rPr lang="zh-CN" altLang="en-US" sz="3600" b="1" dirty="0" smtClean="0">
+              <a:rPr lang="zh-CN" altLang="en-US" sz="3600" b="1" dirty="0">
                 <a:solidFill>
                   <a:srgbClr val="660033"/>
                 </a:solidFill>
@@ -4598,24 +4419,14 @@
               <a:t>副歌</a:t>
             </a:r>
             <a:r>
-              <a:rPr lang="en-US" sz="3600" b="1" dirty="0" smtClean="0">
+              <a:rPr lang="en-US" sz="3600" b="1" dirty="0">
                 <a:solidFill>
                   <a:srgbClr val="660033"/>
                 </a:solidFill>
                 <a:latin typeface="Microsoft JhengHei" panose="020B0604030504040204" pitchFamily="34" charset="-120"/>
                 <a:ea typeface="Microsoft JhengHei" panose="020B0604030504040204" pitchFamily="34" charset="-120"/>
               </a:rPr>
-              <a:t> </a:t>
-            </a:r>
-            <a:r>
-              <a:rPr lang="en-US" sz="3600" b="1" dirty="0">
-                <a:solidFill>
-                  <a:srgbClr val="660033"/>
-                </a:solidFill>
-                <a:latin typeface="Microsoft JhengHei" panose="020B0604030504040204" pitchFamily="34" charset="-120"/>
-                <a:ea typeface="Microsoft JhengHei" panose="020B0604030504040204" pitchFamily="34" charset="-120"/>
-              </a:rPr>
-              <a:t>)</a:t>
+              <a:t> )</a:t>
             </a:r>
             <a:endParaRPr lang="vi-VN" sz="3600" b="1" dirty="0">
               <a:solidFill>
@@ -4682,7 +4493,7 @@
               <a:buNone/>
             </a:pPr>
             <a:r>
-              <a:rPr lang="zh-TW" altLang="en-US" sz="6400" b="1" dirty="0" smtClean="0">
+              <a:rPr lang="zh-TW" altLang="en-US" sz="6400" b="1" dirty="0">
                 <a:solidFill>
                   <a:srgbClr val="660033"/>
                 </a:solidFill>
@@ -4699,27 +4510,17 @@
                 <a:latin typeface="微軟正黑體" pitchFamily="34" charset="-120"/>
                 <a:ea typeface="微軟正黑體" pitchFamily="34" charset="-120"/>
               </a:rPr>
-              <a:t>袮</a:t>
-            </a:r>
-            <a:r>
-              <a:rPr lang="zh-TW" altLang="en-US" sz="6400" b="1" dirty="0" smtClean="0">
+              <a:t>祢</a:t>
+            </a:r>
+            <a:r>
+              <a:rPr lang="zh-TW" altLang="en-US" sz="6400" b="1" dirty="0">
                 <a:solidFill>
                   <a:srgbClr val="660033"/>
                 </a:solidFill>
                 <a:latin typeface="微軟正黑體" pitchFamily="34" charset="-120"/>
                 <a:ea typeface="微軟正黑體" pitchFamily="34" charset="-120"/>
               </a:rPr>
-              <a:t>有</a:t>
-            </a:r>
-            <a:r>
-              <a:rPr lang="zh-TW" altLang="en-US" sz="6400" b="1" dirty="0">
-                <a:solidFill>
-                  <a:srgbClr val="660033"/>
-                </a:solidFill>
-                <a:latin typeface="微軟正黑體" pitchFamily="34" charset="-120"/>
-                <a:ea typeface="微軟正黑體" pitchFamily="34" charset="-120"/>
-              </a:rPr>
-              <a:t>永生江河</a:t>
+              <a:t>有永生江河</a:t>
             </a:r>
             <a:endParaRPr lang="en-US" altLang="zh-TW" sz="6400" b="1" dirty="0">
               <a:solidFill>
@@ -4734,7 +4535,7 @@
               <a:buNone/>
             </a:pPr>
             <a:r>
-              <a:rPr lang="zh-TW" altLang="en-US" sz="6400" b="1" dirty="0" smtClean="0">
+              <a:rPr lang="zh-TW" altLang="en-US" sz="6400" b="1" dirty="0">
                 <a:solidFill>
                   <a:srgbClr val="660033"/>
                 </a:solidFill>
@@ -4751,27 +4552,17 @@
                 <a:latin typeface="微軟正黑體" pitchFamily="34" charset="-120"/>
                 <a:ea typeface="微軟正黑體" pitchFamily="34" charset="-120"/>
               </a:rPr>
-              <a:t>袮</a:t>
-            </a:r>
-            <a:r>
-              <a:rPr lang="zh-TW" altLang="en-US" sz="6400" b="1" dirty="0" smtClean="0">
+              <a:t>祢</a:t>
+            </a:r>
+            <a:r>
+              <a:rPr lang="zh-TW" altLang="en-US" sz="6400" b="1" dirty="0">
                 <a:solidFill>
                   <a:srgbClr val="660033"/>
                 </a:solidFill>
                 <a:latin typeface="微軟正黑體" pitchFamily="34" charset="-120"/>
                 <a:ea typeface="微軟正黑體" pitchFamily="34" charset="-120"/>
               </a:rPr>
-              <a:t>以</a:t>
-            </a:r>
-            <a:r>
-              <a:rPr lang="zh-TW" altLang="en-US" sz="6400" b="1" dirty="0">
-                <a:solidFill>
-                  <a:srgbClr val="660033"/>
-                </a:solidFill>
-                <a:latin typeface="微軟正黑體" pitchFamily="34" charset="-120"/>
-                <a:ea typeface="微軟正黑體" pitchFamily="34" charset="-120"/>
-              </a:rPr>
-              <a:t>外不倚靠別個</a:t>
+              <a:t>以外不倚靠別個</a:t>
             </a:r>
             <a:endParaRPr lang="en-US" sz="6400" b="1" dirty="0">
               <a:solidFill>
@@ -4817,7 +4608,7 @@
               <a:t>( </a:t>
             </a:r>
             <a:r>
-              <a:rPr lang="zh-CN" altLang="en-US" sz="3600" b="1" dirty="0" smtClean="0">
+              <a:rPr lang="zh-CN" altLang="en-US" sz="3600" b="1" dirty="0">
                 <a:solidFill>
                   <a:srgbClr val="660033"/>
                 </a:solidFill>
@@ -4827,24 +4618,14 @@
               <a:t>副歌</a:t>
             </a:r>
             <a:r>
-              <a:rPr lang="en-US" sz="3600" b="1" dirty="0" smtClean="0">
+              <a:rPr lang="en-US" sz="3600" b="1" dirty="0">
                 <a:solidFill>
                   <a:srgbClr val="660033"/>
                 </a:solidFill>
                 <a:latin typeface="Microsoft JhengHei" panose="020B0604030504040204" pitchFamily="34" charset="-120"/>
                 <a:ea typeface="Microsoft JhengHei" panose="020B0604030504040204" pitchFamily="34" charset="-120"/>
               </a:rPr>
-              <a:t> </a:t>
-            </a:r>
-            <a:r>
-              <a:rPr lang="en-US" sz="3600" b="1" dirty="0">
-                <a:solidFill>
-                  <a:srgbClr val="660033"/>
-                </a:solidFill>
-                <a:latin typeface="Microsoft JhengHei" panose="020B0604030504040204" pitchFamily="34" charset="-120"/>
-                <a:ea typeface="Microsoft JhengHei" panose="020B0604030504040204" pitchFamily="34" charset="-120"/>
-              </a:rPr>
-              <a:t>)</a:t>
+              <a:t> )</a:t>
             </a:r>
             <a:endParaRPr lang="vi-VN" sz="3600" b="1" dirty="0">
               <a:solidFill>
